--- a/4 - Calibração/Aula 6.pptx
+++ b/4 - Calibração/Aula 6.pptx
@@ -2954,7 +2954,7 @@
           <a:p>
             <a:fld id="{AB5149D5-B420-4744-8090-67F27462E7E7}" type="datetimeFigureOut">
               <a:rPr lang="pt-BR" smtClean="0"/>
-              <a:t>28/09/2026</a:t>
+              <a:t>29/09/2026</a:t>
             </a:fld>
             <a:endParaRPr lang="pt-BR"/>
           </a:p>
@@ -3152,7 +3152,7 @@
           <a:p>
             <a:fld id="{AB5149D5-B420-4744-8090-67F27462E7E7}" type="datetimeFigureOut">
               <a:rPr lang="pt-BR" smtClean="0"/>
-              <a:t>28/09/2026</a:t>
+              <a:t>29/09/2026</a:t>
             </a:fld>
             <a:endParaRPr lang="pt-BR"/>
           </a:p>
@@ -3360,7 +3360,7 @@
           <a:p>
             <a:fld id="{AB5149D5-B420-4744-8090-67F27462E7E7}" type="datetimeFigureOut">
               <a:rPr lang="pt-BR" smtClean="0"/>
-              <a:t>28/09/2026</a:t>
+              <a:t>29/09/2026</a:t>
             </a:fld>
             <a:endParaRPr lang="pt-BR"/>
           </a:p>
@@ -3558,7 +3558,7 @@
           <a:p>
             <a:fld id="{AB5149D5-B420-4744-8090-67F27462E7E7}" type="datetimeFigureOut">
               <a:rPr lang="pt-BR" smtClean="0"/>
-              <a:t>28/09/2026</a:t>
+              <a:t>29/09/2026</a:t>
             </a:fld>
             <a:endParaRPr lang="pt-BR"/>
           </a:p>
@@ -3833,7 +3833,7 @@
           <a:p>
             <a:fld id="{AB5149D5-B420-4744-8090-67F27462E7E7}" type="datetimeFigureOut">
               <a:rPr lang="pt-BR" smtClean="0"/>
-              <a:t>28/09/2026</a:t>
+              <a:t>29/09/2026</a:t>
             </a:fld>
             <a:endParaRPr lang="pt-BR"/>
           </a:p>
@@ -4098,7 +4098,7 @@
           <a:p>
             <a:fld id="{AB5149D5-B420-4744-8090-67F27462E7E7}" type="datetimeFigureOut">
               <a:rPr lang="pt-BR" smtClean="0"/>
-              <a:t>28/09/2026</a:t>
+              <a:t>29/09/2026</a:t>
             </a:fld>
             <a:endParaRPr lang="pt-BR"/>
           </a:p>
@@ -4510,7 +4510,7 @@
           <a:p>
             <a:fld id="{AB5149D5-B420-4744-8090-67F27462E7E7}" type="datetimeFigureOut">
               <a:rPr lang="pt-BR" smtClean="0"/>
-              <a:t>28/09/2026</a:t>
+              <a:t>29/09/2026</a:t>
             </a:fld>
             <a:endParaRPr lang="pt-BR"/>
           </a:p>
@@ -4651,7 +4651,7 @@
           <a:p>
             <a:fld id="{AB5149D5-B420-4744-8090-67F27462E7E7}" type="datetimeFigureOut">
               <a:rPr lang="pt-BR" smtClean="0"/>
-              <a:t>28/09/2026</a:t>
+              <a:t>29/09/2026</a:t>
             </a:fld>
             <a:endParaRPr lang="pt-BR"/>
           </a:p>
@@ -4764,7 +4764,7 @@
           <a:p>
             <a:fld id="{AB5149D5-B420-4744-8090-67F27462E7E7}" type="datetimeFigureOut">
               <a:rPr lang="pt-BR" smtClean="0"/>
-              <a:t>28/09/2026</a:t>
+              <a:t>29/09/2026</a:t>
             </a:fld>
             <a:endParaRPr lang="pt-BR"/>
           </a:p>
@@ -5075,7 +5075,7 @@
           <a:p>
             <a:fld id="{AB5149D5-B420-4744-8090-67F27462E7E7}" type="datetimeFigureOut">
               <a:rPr lang="pt-BR" smtClean="0"/>
-              <a:t>28/09/2026</a:t>
+              <a:t>29/09/2026</a:t>
             </a:fld>
             <a:endParaRPr lang="pt-BR"/>
           </a:p>
@@ -5363,7 +5363,7 @@
           <a:p>
             <a:fld id="{AB5149D5-B420-4744-8090-67F27462E7E7}" type="datetimeFigureOut">
               <a:rPr lang="pt-BR" smtClean="0"/>
-              <a:t>28/09/2026</a:t>
+              <a:t>29/09/2026</a:t>
             </a:fld>
             <a:endParaRPr lang="pt-BR"/>
           </a:p>
@@ -5604,7 +5604,7 @@
           <a:p>
             <a:fld id="{AB5149D5-B420-4744-8090-67F27462E7E7}" type="datetimeFigureOut">
               <a:rPr lang="pt-BR" smtClean="0"/>
-              <a:t>28/09/2026</a:t>
+              <a:t>29/09/2026</a:t>
             </a:fld>
             <a:endParaRPr lang="pt-BR"/>
           </a:p>
@@ -6048,7 +6048,7 @@
             </a:r>
             <a:r>
               <a:rPr lang="pt-BR" dirty="0" err="1"/>
-              <a:t>Stear</a:t>
+              <a:t>Sttear</a:t>
             </a:r>
             <a:endParaRPr lang="pt-BR" dirty="0"/>
           </a:p>
